--- a/cuhk-csc-1004/slides/CSC1004 Tutorial 5.pptx
+++ b/cuhk-csc-1004/slides/CSC1004 Tutorial 5.pptx
@@ -5,27 +5,26 @@
     <p:sldMasterId id="2147483648" r:id="rId1"/>
   </p:sldMasterIdLst>
   <p:notesMasterIdLst>
-    <p:notesMasterId r:id="rId15"/>
+    <p:notesMasterId r:id="rId14"/>
   </p:notesMasterIdLst>
   <p:sldIdLst>
     <p:sldId id="257" r:id="rId2"/>
-    <p:sldId id="347" r:id="rId3"/>
-    <p:sldId id="334" r:id="rId4"/>
-    <p:sldId id="340" r:id="rId5"/>
-    <p:sldId id="337" r:id="rId6"/>
-    <p:sldId id="343" r:id="rId7"/>
-    <p:sldId id="341" r:id="rId8"/>
-    <p:sldId id="344" r:id="rId9"/>
-    <p:sldId id="346" r:id="rId10"/>
-    <p:sldId id="333" r:id="rId11"/>
-    <p:sldId id="345" r:id="rId12"/>
-    <p:sldId id="342" r:id="rId13"/>
-    <p:sldId id="262" r:id="rId14"/>
+    <p:sldId id="334" r:id="rId3"/>
+    <p:sldId id="340" r:id="rId4"/>
+    <p:sldId id="337" r:id="rId5"/>
+    <p:sldId id="343" r:id="rId6"/>
+    <p:sldId id="341" r:id="rId7"/>
+    <p:sldId id="344" r:id="rId8"/>
+    <p:sldId id="346" r:id="rId9"/>
+    <p:sldId id="333" r:id="rId10"/>
+    <p:sldId id="345" r:id="rId11"/>
+    <p:sldId id="342" r:id="rId12"/>
+    <p:sldId id="262" r:id="rId13"/>
   </p:sldIdLst>
   <p:sldSz cx="12192000" cy="6858000"/>
   <p:notesSz cx="6858000" cy="9144000"/>
   <p:custDataLst>
-    <p:tags r:id="rId16"/>
+    <p:tags r:id="rId15"/>
   </p:custDataLst>
   <p:defaultTextStyle>
     <a:lvl1pPr marL="0" lvl="0" algn="l" defTabSz="914400">
@@ -206,7 +205,7 @@
           <a:p>
             <a:fld id="{78F13B20-8BB8-B74B-ADB5-DA5707988F1E}" type="datetimeFigureOut">
               <a:rPr lang="zh-CN" altLang="en-US"/>
-              <a:t>2025/3/3</a:t>
+              <a:t>2026/3/13</a:t>
             </a:fld>
             <a:endParaRPr kumimoji="1" lang="zh-CN" altLang="en-US"/>
           </a:p>
@@ -1485,7 +1484,7 @@
               <a:rPr lang="en-US" altLang="zh-CN" sz="2400" dirty="0">
                 <a:latin typeface="Calibri" panose="020F0502020204030204"/>
               </a:rPr>
-              <a:t>Yan Ke</a:t>
+              <a:t>Ruixing Jin</a:t>
             </a:r>
             <a:endParaRPr lang="zh-CN" sz="3600" dirty="0">
               <a:latin typeface="Calibri" panose="020F0502020204030204"/>
@@ -1502,819 +1501,6 @@
 </file>
 
 <file path=ppt/slides/slide10.xml><?xml version="1.0" encoding="utf-8"?>
-<p:sld xmlns:a="http://schemas.openxmlformats.org/drawingml/2006/main" xmlns:r="http://schemas.openxmlformats.org/officeDocument/2006/relationships" xmlns:p="http://schemas.openxmlformats.org/presentationml/2006/main">
-  <p:cSld>
-    <p:spTree>
-      <p:nvGrpSpPr>
-        <p:cNvPr id="1" name=""/>
-        <p:cNvGrpSpPr/>
-        <p:nvPr/>
-      </p:nvGrpSpPr>
-      <p:grpSpPr>
-        <a:xfrm>
-          <a:off x="0" y="0"/>
-          <a:ext cx="0" cy="0"/>
-          <a:chOff x="0" y="0"/>
-          <a:chExt cx="0" cy="0"/>
-        </a:xfrm>
-      </p:grpSpPr>
-      <p:sp>
-        <p:nvSpPr>
-          <p:cNvPr id="1048589" name="标题 4"/>
-          <p:cNvSpPr>
-            <a:spLocks noGrp="1"/>
-          </p:cNvSpPr>
-          <p:nvPr>
-            <p:ph type="title"/>
-          </p:nvPr>
-        </p:nvSpPr>
-        <p:spPr/>
-        <p:txBody>
-          <a:bodyPr>
-            <a:normAutofit/>
-          </a:bodyPr>
-          <a:lstStyle/>
-          <a:p>
-            <a:r>
-              <a:rPr lang="en-US" altLang="zh-CN" sz="4000" dirty="0"/>
-              <a:t>Sample Input / Output</a:t>
-            </a:r>
-            <a:endParaRPr lang="zh-CN" sz="4000" dirty="0"/>
-          </a:p>
-        </p:txBody>
-      </p:sp>
-      <p:pic>
-        <p:nvPicPr>
-          <p:cNvPr id="3" name="图片 2">
-            <a:extLst>
-              <a:ext uri="{FF2B5EF4-FFF2-40B4-BE49-F238E27FC236}">
-                <a16:creationId xmlns:a16="http://schemas.microsoft.com/office/drawing/2014/main" id="{F0DA8A89-735F-33BC-793C-A0B2730D9C0F}"/>
-              </a:ext>
-            </a:extLst>
-          </p:cNvPr>
-          <p:cNvPicPr>
-            <a:picLocks noChangeAspect="1"/>
-          </p:cNvPicPr>
-          <p:nvPr/>
-        </p:nvPicPr>
-        <p:blipFill>
-          <a:blip r:embed="rId2"/>
-          <a:stretch>
-            <a:fillRect/>
-          </a:stretch>
-        </p:blipFill>
-        <p:spPr>
-          <a:xfrm>
-            <a:off x="479376" y="1332218"/>
-            <a:ext cx="3526630" cy="2448272"/>
-          </a:xfrm>
-          <a:prstGeom prst="rect">
-            <a:avLst/>
-          </a:prstGeom>
-        </p:spPr>
-      </p:pic>
-      <p:pic>
-        <p:nvPicPr>
-          <p:cNvPr id="7" name="图片 6">
-            <a:extLst>
-              <a:ext uri="{FF2B5EF4-FFF2-40B4-BE49-F238E27FC236}">
-                <a16:creationId xmlns:a16="http://schemas.microsoft.com/office/drawing/2014/main" id="{2E5E1A90-C41C-1431-EBED-2BC465250CD3}"/>
-              </a:ext>
-            </a:extLst>
-          </p:cNvPr>
-          <p:cNvPicPr>
-            <a:picLocks noChangeAspect="1"/>
-          </p:cNvPicPr>
-          <p:nvPr/>
-        </p:nvPicPr>
-        <p:blipFill>
-          <a:blip r:embed="rId3"/>
-          <a:stretch>
-            <a:fillRect/>
-          </a:stretch>
-        </p:blipFill>
-        <p:spPr>
-          <a:xfrm>
-            <a:off x="5999526" y="1332218"/>
-            <a:ext cx="3558582" cy="2448272"/>
-          </a:xfrm>
-          <a:prstGeom prst="rect">
-            <a:avLst/>
-          </a:prstGeom>
-        </p:spPr>
-      </p:pic>
-      <p:pic>
-        <p:nvPicPr>
-          <p:cNvPr id="12" name="图片 11">
-            <a:extLst>
-              <a:ext uri="{FF2B5EF4-FFF2-40B4-BE49-F238E27FC236}">
-                <a16:creationId xmlns:a16="http://schemas.microsoft.com/office/drawing/2014/main" id="{748AB263-5386-B9E8-9845-F91DC9D2FA5B}"/>
-              </a:ext>
-            </a:extLst>
-          </p:cNvPr>
-          <p:cNvPicPr>
-            <a:picLocks noChangeAspect="1"/>
-          </p:cNvPicPr>
-          <p:nvPr/>
-        </p:nvPicPr>
-        <p:blipFill rotWithShape="1">
-          <a:blip r:embed="rId4"/>
-          <a:srcRect b="669"/>
-          <a:stretch/>
-        </p:blipFill>
-        <p:spPr>
-          <a:xfrm>
-            <a:off x="503495" y="4054062"/>
-            <a:ext cx="3526630" cy="2399274"/>
-          </a:xfrm>
-          <a:prstGeom prst="rect">
-            <a:avLst/>
-          </a:prstGeom>
-        </p:spPr>
-      </p:pic>
-      <p:pic>
-        <p:nvPicPr>
-          <p:cNvPr id="15" name="图片 14">
-            <a:extLst>
-              <a:ext uri="{FF2B5EF4-FFF2-40B4-BE49-F238E27FC236}">
-                <a16:creationId xmlns:a16="http://schemas.microsoft.com/office/drawing/2014/main" id="{51B99DEB-2D80-85E0-7BA5-8D5033DC10AA}"/>
-              </a:ext>
-            </a:extLst>
-          </p:cNvPr>
-          <p:cNvPicPr>
-            <a:picLocks noChangeAspect="1"/>
-          </p:cNvPicPr>
-          <p:nvPr/>
-        </p:nvPicPr>
-        <p:blipFill rotWithShape="1">
-          <a:blip r:embed="rId5"/>
-          <a:srcRect b="527"/>
-          <a:stretch/>
-        </p:blipFill>
-        <p:spPr>
-          <a:xfrm>
-            <a:off x="6299465" y="4010232"/>
-            <a:ext cx="3043171" cy="2486934"/>
-          </a:xfrm>
-          <a:prstGeom prst="rect">
-            <a:avLst/>
-          </a:prstGeom>
-        </p:spPr>
-      </p:pic>
-      <p:sp>
-        <p:nvSpPr>
-          <p:cNvPr id="17" name="文本框 16">
-            <a:extLst>
-              <a:ext uri="{FF2B5EF4-FFF2-40B4-BE49-F238E27FC236}">
-                <a16:creationId xmlns:a16="http://schemas.microsoft.com/office/drawing/2014/main" id="{7ADFFD97-1D7B-A28F-4308-10077F6FD85A}"/>
-              </a:ext>
-            </a:extLst>
-          </p:cNvPr>
-          <p:cNvSpPr txBox="1"/>
-          <p:nvPr/>
-        </p:nvSpPr>
-        <p:spPr>
-          <a:xfrm>
-            <a:off x="4030125" y="2132195"/>
-            <a:ext cx="1944216" cy="584775"/>
-          </a:xfrm>
-          <a:prstGeom prst="rect">
-            <a:avLst/>
-          </a:prstGeom>
-          <a:noFill/>
-        </p:spPr>
-        <p:txBody>
-          <a:bodyPr wrap="square" rtlCol="0">
-            <a:spAutoFit/>
-          </a:bodyPr>
-          <a:lstStyle/>
-          <a:p>
-            <a:r>
-              <a:rPr lang="zh-CN" altLang="en-US" sz="1600" dirty="0"/>
-              <a:t>① </a:t>
-            </a:r>
-            <a:r>
-              <a:rPr lang="en-US" altLang="zh-CN" sz="1600" dirty="0"/>
-              <a:t>Initialized board</a:t>
-            </a:r>
-          </a:p>
-          <a:p>
-            <a:r>
-              <a:rPr lang="en-US" altLang="zh-CN" sz="1600" dirty="0"/>
-              <a:t>     Player 1 picks (1,1)</a:t>
-            </a:r>
-          </a:p>
-        </p:txBody>
-      </p:sp>
-      <p:sp>
-        <p:nvSpPr>
-          <p:cNvPr id="18" name="文本框 17">
-            <a:extLst>
-              <a:ext uri="{FF2B5EF4-FFF2-40B4-BE49-F238E27FC236}">
-                <a16:creationId xmlns:a16="http://schemas.microsoft.com/office/drawing/2014/main" id="{AB906864-695E-8EB4-BD97-622807CF6924}"/>
-              </a:ext>
-            </a:extLst>
-          </p:cNvPr>
-          <p:cNvSpPr txBox="1"/>
-          <p:nvPr/>
-        </p:nvSpPr>
-        <p:spPr>
-          <a:xfrm>
-            <a:off x="9743942" y="2132195"/>
-            <a:ext cx="2184706" cy="584775"/>
-          </a:xfrm>
-          <a:prstGeom prst="rect">
-            <a:avLst/>
-          </a:prstGeom>
-          <a:noFill/>
-        </p:spPr>
-        <p:txBody>
-          <a:bodyPr wrap="square" rtlCol="0">
-            <a:spAutoFit/>
-          </a:bodyPr>
-          <a:lstStyle/>
-          <a:p>
-            <a:r>
-              <a:rPr lang="zh-CN" altLang="en-US" sz="1600" dirty="0"/>
-              <a:t>② </a:t>
-            </a:r>
-            <a:r>
-              <a:rPr lang="en-US" altLang="zh-CN" sz="1600" dirty="0"/>
-              <a:t>(1,1) shown with “X”</a:t>
-            </a:r>
-          </a:p>
-          <a:p>
-            <a:r>
-              <a:rPr lang="en-US" altLang="zh-CN" sz="1600" dirty="0"/>
-              <a:t>     Player 2 picks (1,2)</a:t>
-            </a:r>
-          </a:p>
-        </p:txBody>
-      </p:sp>
-      <p:sp>
-        <p:nvSpPr>
-          <p:cNvPr id="19" name="文本框 18">
-            <a:extLst>
-              <a:ext uri="{FF2B5EF4-FFF2-40B4-BE49-F238E27FC236}">
-                <a16:creationId xmlns:a16="http://schemas.microsoft.com/office/drawing/2014/main" id="{096283CD-9E7F-E506-6FD1-AE523DD84E76}"/>
-              </a:ext>
-            </a:extLst>
-          </p:cNvPr>
-          <p:cNvSpPr txBox="1"/>
-          <p:nvPr/>
-        </p:nvSpPr>
-        <p:spPr>
-          <a:xfrm>
-            <a:off x="4079776" y="4293096"/>
-            <a:ext cx="2184706" cy="584775"/>
-          </a:xfrm>
-          <a:prstGeom prst="rect">
-            <a:avLst/>
-          </a:prstGeom>
-          <a:noFill/>
-        </p:spPr>
-        <p:txBody>
-          <a:bodyPr wrap="square" rtlCol="0">
-            <a:spAutoFit/>
-          </a:bodyPr>
-          <a:lstStyle/>
-          <a:p>
-            <a:r>
-              <a:rPr lang="zh-CN" altLang="en-US" sz="1600" dirty="0"/>
-              <a:t>③ </a:t>
-            </a:r>
-            <a:r>
-              <a:rPr lang="en-US" altLang="zh-CN" sz="1600" dirty="0"/>
-              <a:t>(1,2) shown with “O”</a:t>
-            </a:r>
-          </a:p>
-          <a:p>
-            <a:r>
-              <a:rPr lang="en-US" altLang="zh-CN" sz="1600" dirty="0"/>
-              <a:t>     Player 2 picks (1,1)</a:t>
-            </a:r>
-          </a:p>
-        </p:txBody>
-      </p:sp>
-      <p:sp>
-        <p:nvSpPr>
-          <p:cNvPr id="21" name="文本框 20">
-            <a:extLst>
-              <a:ext uri="{FF2B5EF4-FFF2-40B4-BE49-F238E27FC236}">
-                <a16:creationId xmlns:a16="http://schemas.microsoft.com/office/drawing/2014/main" id="{F7D7F0D5-F9DD-B515-ED0B-C65298166B2E}"/>
-              </a:ext>
-            </a:extLst>
-          </p:cNvPr>
-          <p:cNvSpPr txBox="1"/>
-          <p:nvPr/>
-        </p:nvSpPr>
-        <p:spPr>
-          <a:xfrm>
-            <a:off x="9696400" y="4293675"/>
-            <a:ext cx="2184706" cy="584775"/>
-          </a:xfrm>
-          <a:prstGeom prst="rect">
-            <a:avLst/>
-          </a:prstGeom>
-          <a:noFill/>
-        </p:spPr>
-        <p:txBody>
-          <a:bodyPr wrap="square" rtlCol="0">
-            <a:spAutoFit/>
-          </a:bodyPr>
-          <a:lstStyle/>
-          <a:p>
-            <a:r>
-              <a:rPr lang="zh-CN" altLang="en-US" sz="1600" dirty="0"/>
-              <a:t>④ </a:t>
-            </a:r>
-            <a:r>
-              <a:rPr lang="en-US" altLang="zh-CN" sz="1600" dirty="0"/>
-              <a:t>Invalid hint provided</a:t>
-            </a:r>
-          </a:p>
-          <a:p>
-            <a:r>
-              <a:rPr lang="en-US" altLang="zh-CN" sz="1600" dirty="0"/>
-              <a:t>     Player 1 picks again</a:t>
-            </a:r>
-          </a:p>
-        </p:txBody>
-      </p:sp>
-    </p:spTree>
-    <p:extLst>
-      <p:ext uri="{BB962C8B-B14F-4D97-AF65-F5344CB8AC3E}">
-        <p14:creationId xmlns:p14="http://schemas.microsoft.com/office/powerpoint/2010/main" val="2605814159"/>
-      </p:ext>
-    </p:extLst>
-  </p:cSld>
-  <p:clrMapOvr>
-    <a:masterClrMapping/>
-  </p:clrMapOvr>
-  <p:timing>
-    <p:tnLst>
-      <p:par>
-        <p:cTn id="1" dur="indefinite" restart="never" nodeType="tmRoot">
-          <p:childTnLst>
-            <p:seq concurrent="1" nextAc="seek">
-              <p:cTn id="2" dur="indefinite" nodeType="mainSeq">
-                <p:childTnLst>
-                  <p:par>
-                    <p:cTn id="3" fill="hold">
-                      <p:stCondLst>
-                        <p:cond delay="indefinite"/>
-                      </p:stCondLst>
-                      <p:childTnLst>
-                        <p:par>
-                          <p:cTn id="4" fill="hold">
-                            <p:stCondLst>
-                              <p:cond delay="0"/>
-                            </p:stCondLst>
-                            <p:childTnLst>
-                              <p:par>
-                                <p:cTn id="5" presetID="10" presetClass="entr" presetSubtype="0" fill="hold" nodeType="clickEffect">
-                                  <p:stCondLst>
-                                    <p:cond delay="0"/>
-                                  </p:stCondLst>
-                                  <p:childTnLst>
-                                    <p:set>
-                                      <p:cBhvr>
-                                        <p:cTn id="6" dur="1" fill="hold">
-                                          <p:stCondLst>
-                                            <p:cond delay="0"/>
-                                          </p:stCondLst>
-                                        </p:cTn>
-                                        <p:tgtEl>
-                                          <p:spTgt spid="3"/>
-                                        </p:tgtEl>
-                                        <p:attrNameLst>
-                                          <p:attrName>style.visibility</p:attrName>
-                                        </p:attrNameLst>
-                                      </p:cBhvr>
-                                      <p:to>
-                                        <p:strVal val="visible"/>
-                                      </p:to>
-                                    </p:set>
-                                    <p:animEffect transition="in" filter="fade">
-                                      <p:cBhvr>
-                                        <p:cTn id="7" dur="500"/>
-                                        <p:tgtEl>
-                                          <p:spTgt spid="3"/>
-                                        </p:tgtEl>
-                                      </p:cBhvr>
-                                    </p:animEffect>
-                                  </p:childTnLst>
-                                </p:cTn>
-                              </p:par>
-                            </p:childTnLst>
-                          </p:cTn>
-                        </p:par>
-                      </p:childTnLst>
-                    </p:cTn>
-                  </p:par>
-                  <p:par>
-                    <p:cTn id="8" fill="hold">
-                      <p:stCondLst>
-                        <p:cond delay="indefinite"/>
-                      </p:stCondLst>
-                      <p:childTnLst>
-                        <p:par>
-                          <p:cTn id="9" fill="hold">
-                            <p:stCondLst>
-                              <p:cond delay="0"/>
-                            </p:stCondLst>
-                            <p:childTnLst>
-                              <p:par>
-                                <p:cTn id="10" presetID="10" presetClass="entr" presetSubtype="0" fill="hold" grpId="0" nodeType="clickEffect">
-                                  <p:stCondLst>
-                                    <p:cond delay="0"/>
-                                  </p:stCondLst>
-                                  <p:childTnLst>
-                                    <p:set>
-                                      <p:cBhvr>
-                                        <p:cTn id="11" dur="1" fill="hold">
-                                          <p:stCondLst>
-                                            <p:cond delay="0"/>
-                                          </p:stCondLst>
-                                        </p:cTn>
-                                        <p:tgtEl>
-                                          <p:spTgt spid="17"/>
-                                        </p:tgtEl>
-                                        <p:attrNameLst>
-                                          <p:attrName>style.visibility</p:attrName>
-                                        </p:attrNameLst>
-                                      </p:cBhvr>
-                                      <p:to>
-                                        <p:strVal val="visible"/>
-                                      </p:to>
-                                    </p:set>
-                                    <p:animEffect transition="in" filter="fade">
-                                      <p:cBhvr>
-                                        <p:cTn id="12" dur="500"/>
-                                        <p:tgtEl>
-                                          <p:spTgt spid="17"/>
-                                        </p:tgtEl>
-                                      </p:cBhvr>
-                                    </p:animEffect>
-                                  </p:childTnLst>
-                                </p:cTn>
-                              </p:par>
-                            </p:childTnLst>
-                          </p:cTn>
-                        </p:par>
-                      </p:childTnLst>
-                    </p:cTn>
-                  </p:par>
-                  <p:par>
-                    <p:cTn id="13" fill="hold">
-                      <p:stCondLst>
-                        <p:cond delay="indefinite"/>
-                      </p:stCondLst>
-                      <p:childTnLst>
-                        <p:par>
-                          <p:cTn id="14" fill="hold">
-                            <p:stCondLst>
-                              <p:cond delay="0"/>
-                            </p:stCondLst>
-                            <p:childTnLst>
-                              <p:par>
-                                <p:cTn id="15" presetID="10" presetClass="entr" presetSubtype="0" fill="hold" nodeType="clickEffect">
-                                  <p:stCondLst>
-                                    <p:cond delay="0"/>
-                                  </p:stCondLst>
-                                  <p:childTnLst>
-                                    <p:set>
-                                      <p:cBhvr>
-                                        <p:cTn id="16" dur="1" fill="hold">
-                                          <p:stCondLst>
-                                            <p:cond delay="0"/>
-                                          </p:stCondLst>
-                                        </p:cTn>
-                                        <p:tgtEl>
-                                          <p:spTgt spid="7"/>
-                                        </p:tgtEl>
-                                        <p:attrNameLst>
-                                          <p:attrName>style.visibility</p:attrName>
-                                        </p:attrNameLst>
-                                      </p:cBhvr>
-                                      <p:to>
-                                        <p:strVal val="visible"/>
-                                      </p:to>
-                                    </p:set>
-                                    <p:animEffect transition="in" filter="fade">
-                                      <p:cBhvr>
-                                        <p:cTn id="17" dur="500"/>
-                                        <p:tgtEl>
-                                          <p:spTgt spid="7"/>
-                                        </p:tgtEl>
-                                      </p:cBhvr>
-                                    </p:animEffect>
-                                  </p:childTnLst>
-                                </p:cTn>
-                              </p:par>
-                            </p:childTnLst>
-                          </p:cTn>
-                        </p:par>
-                      </p:childTnLst>
-                    </p:cTn>
-                  </p:par>
-                  <p:par>
-                    <p:cTn id="18" fill="hold">
-                      <p:stCondLst>
-                        <p:cond delay="indefinite"/>
-                      </p:stCondLst>
-                      <p:childTnLst>
-                        <p:par>
-                          <p:cTn id="19" fill="hold">
-                            <p:stCondLst>
-                              <p:cond delay="0"/>
-                            </p:stCondLst>
-                            <p:childTnLst>
-                              <p:par>
-                                <p:cTn id="20" presetID="10" presetClass="entr" presetSubtype="0" fill="hold" grpId="0" nodeType="clickEffect">
-                                  <p:stCondLst>
-                                    <p:cond delay="0"/>
-                                  </p:stCondLst>
-                                  <p:childTnLst>
-                                    <p:set>
-                                      <p:cBhvr>
-                                        <p:cTn id="21" dur="1" fill="hold">
-                                          <p:stCondLst>
-                                            <p:cond delay="0"/>
-                                          </p:stCondLst>
-                                        </p:cTn>
-                                        <p:tgtEl>
-                                          <p:spTgt spid="18"/>
-                                        </p:tgtEl>
-                                        <p:attrNameLst>
-                                          <p:attrName>style.visibility</p:attrName>
-                                        </p:attrNameLst>
-                                      </p:cBhvr>
-                                      <p:to>
-                                        <p:strVal val="visible"/>
-                                      </p:to>
-                                    </p:set>
-                                    <p:animEffect transition="in" filter="fade">
-                                      <p:cBhvr>
-                                        <p:cTn id="22" dur="500"/>
-                                        <p:tgtEl>
-                                          <p:spTgt spid="18"/>
-                                        </p:tgtEl>
-                                      </p:cBhvr>
-                                    </p:animEffect>
-                                  </p:childTnLst>
-                                </p:cTn>
-                              </p:par>
-                            </p:childTnLst>
-                          </p:cTn>
-                        </p:par>
-                      </p:childTnLst>
-                    </p:cTn>
-                  </p:par>
-                  <p:par>
-                    <p:cTn id="23" fill="hold">
-                      <p:stCondLst>
-                        <p:cond delay="indefinite"/>
-                      </p:stCondLst>
-                      <p:childTnLst>
-                        <p:par>
-                          <p:cTn id="24" fill="hold">
-                            <p:stCondLst>
-                              <p:cond delay="0"/>
-                            </p:stCondLst>
-                            <p:childTnLst>
-                              <p:par>
-                                <p:cTn id="25" presetID="10" presetClass="entr" presetSubtype="0" fill="hold" nodeType="clickEffect">
-                                  <p:stCondLst>
-                                    <p:cond delay="0"/>
-                                  </p:stCondLst>
-                                  <p:childTnLst>
-                                    <p:set>
-                                      <p:cBhvr>
-                                        <p:cTn id="26" dur="1" fill="hold">
-                                          <p:stCondLst>
-                                            <p:cond delay="0"/>
-                                          </p:stCondLst>
-                                        </p:cTn>
-                                        <p:tgtEl>
-                                          <p:spTgt spid="12"/>
-                                        </p:tgtEl>
-                                        <p:attrNameLst>
-                                          <p:attrName>style.visibility</p:attrName>
-                                        </p:attrNameLst>
-                                      </p:cBhvr>
-                                      <p:to>
-                                        <p:strVal val="visible"/>
-                                      </p:to>
-                                    </p:set>
-                                    <p:animEffect transition="in" filter="fade">
-                                      <p:cBhvr>
-                                        <p:cTn id="27" dur="500"/>
-                                        <p:tgtEl>
-                                          <p:spTgt spid="12"/>
-                                        </p:tgtEl>
-                                      </p:cBhvr>
-                                    </p:animEffect>
-                                  </p:childTnLst>
-                                </p:cTn>
-                              </p:par>
-                            </p:childTnLst>
-                          </p:cTn>
-                        </p:par>
-                      </p:childTnLst>
-                    </p:cTn>
-                  </p:par>
-                  <p:par>
-                    <p:cTn id="28" fill="hold">
-                      <p:stCondLst>
-                        <p:cond delay="indefinite"/>
-                      </p:stCondLst>
-                      <p:childTnLst>
-                        <p:par>
-                          <p:cTn id="29" fill="hold">
-                            <p:stCondLst>
-                              <p:cond delay="0"/>
-                            </p:stCondLst>
-                            <p:childTnLst>
-                              <p:par>
-                                <p:cTn id="30" presetID="10" presetClass="entr" presetSubtype="0" fill="hold" grpId="0" nodeType="clickEffect">
-                                  <p:stCondLst>
-                                    <p:cond delay="0"/>
-                                  </p:stCondLst>
-                                  <p:childTnLst>
-                                    <p:set>
-                                      <p:cBhvr>
-                                        <p:cTn id="31" dur="1" fill="hold">
-                                          <p:stCondLst>
-                                            <p:cond delay="0"/>
-                                          </p:stCondLst>
-                                        </p:cTn>
-                                        <p:tgtEl>
-                                          <p:spTgt spid="19"/>
-                                        </p:tgtEl>
-                                        <p:attrNameLst>
-                                          <p:attrName>style.visibility</p:attrName>
-                                        </p:attrNameLst>
-                                      </p:cBhvr>
-                                      <p:to>
-                                        <p:strVal val="visible"/>
-                                      </p:to>
-                                    </p:set>
-                                    <p:animEffect transition="in" filter="fade">
-                                      <p:cBhvr>
-                                        <p:cTn id="32" dur="500"/>
-                                        <p:tgtEl>
-                                          <p:spTgt spid="19"/>
-                                        </p:tgtEl>
-                                      </p:cBhvr>
-                                    </p:animEffect>
-                                  </p:childTnLst>
-                                </p:cTn>
-                              </p:par>
-                            </p:childTnLst>
-                          </p:cTn>
-                        </p:par>
-                      </p:childTnLst>
-                    </p:cTn>
-                  </p:par>
-                  <p:par>
-                    <p:cTn id="33" fill="hold">
-                      <p:stCondLst>
-                        <p:cond delay="indefinite"/>
-                      </p:stCondLst>
-                      <p:childTnLst>
-                        <p:par>
-                          <p:cTn id="34" fill="hold">
-                            <p:stCondLst>
-                              <p:cond delay="0"/>
-                            </p:stCondLst>
-                            <p:childTnLst>
-                              <p:par>
-                                <p:cTn id="35" presetID="10" presetClass="entr" presetSubtype="0" fill="hold" nodeType="clickEffect">
-                                  <p:stCondLst>
-                                    <p:cond delay="0"/>
-                                  </p:stCondLst>
-                                  <p:childTnLst>
-                                    <p:set>
-                                      <p:cBhvr>
-                                        <p:cTn id="36" dur="1" fill="hold">
-                                          <p:stCondLst>
-                                            <p:cond delay="0"/>
-                                          </p:stCondLst>
-                                        </p:cTn>
-                                        <p:tgtEl>
-                                          <p:spTgt spid="15"/>
-                                        </p:tgtEl>
-                                        <p:attrNameLst>
-                                          <p:attrName>style.visibility</p:attrName>
-                                        </p:attrNameLst>
-                                      </p:cBhvr>
-                                      <p:to>
-                                        <p:strVal val="visible"/>
-                                      </p:to>
-                                    </p:set>
-                                    <p:animEffect transition="in" filter="fade">
-                                      <p:cBhvr>
-                                        <p:cTn id="37" dur="500"/>
-                                        <p:tgtEl>
-                                          <p:spTgt spid="15"/>
-                                        </p:tgtEl>
-                                      </p:cBhvr>
-                                    </p:animEffect>
-                                  </p:childTnLst>
-                                </p:cTn>
-                              </p:par>
-                            </p:childTnLst>
-                          </p:cTn>
-                        </p:par>
-                      </p:childTnLst>
-                    </p:cTn>
-                  </p:par>
-                  <p:par>
-                    <p:cTn id="38" fill="hold">
-                      <p:stCondLst>
-                        <p:cond delay="indefinite"/>
-                      </p:stCondLst>
-                      <p:childTnLst>
-                        <p:par>
-                          <p:cTn id="39" fill="hold">
-                            <p:stCondLst>
-                              <p:cond delay="0"/>
-                            </p:stCondLst>
-                            <p:childTnLst>
-                              <p:par>
-                                <p:cTn id="40" presetID="10" presetClass="entr" presetSubtype="0" fill="hold" grpId="0" nodeType="clickEffect">
-                                  <p:stCondLst>
-                                    <p:cond delay="0"/>
-                                  </p:stCondLst>
-                                  <p:childTnLst>
-                                    <p:set>
-                                      <p:cBhvr>
-                                        <p:cTn id="41" dur="1" fill="hold">
-                                          <p:stCondLst>
-                                            <p:cond delay="0"/>
-                                          </p:stCondLst>
-                                        </p:cTn>
-                                        <p:tgtEl>
-                                          <p:spTgt spid="21"/>
-                                        </p:tgtEl>
-                                        <p:attrNameLst>
-                                          <p:attrName>style.visibility</p:attrName>
-                                        </p:attrNameLst>
-                                      </p:cBhvr>
-                                      <p:to>
-                                        <p:strVal val="visible"/>
-                                      </p:to>
-                                    </p:set>
-                                    <p:animEffect transition="in" filter="fade">
-                                      <p:cBhvr>
-                                        <p:cTn id="42" dur="500"/>
-                                        <p:tgtEl>
-                                          <p:spTgt spid="21"/>
-                                        </p:tgtEl>
-                                      </p:cBhvr>
-                                    </p:animEffect>
-                                  </p:childTnLst>
-                                </p:cTn>
-                              </p:par>
-                            </p:childTnLst>
-                          </p:cTn>
-                        </p:par>
-                      </p:childTnLst>
-                    </p:cTn>
-                  </p:par>
-                </p:childTnLst>
-              </p:cTn>
-              <p:prevCondLst>
-                <p:cond evt="onPrev" delay="0">
-                  <p:tgtEl>
-                    <p:sldTgt/>
-                  </p:tgtEl>
-                </p:cond>
-              </p:prevCondLst>
-              <p:nextCondLst>
-                <p:cond evt="onNext" delay="0">
-                  <p:tgtEl>
-                    <p:sldTgt/>
-                  </p:tgtEl>
-                </p:cond>
-              </p:nextCondLst>
-            </p:seq>
-          </p:childTnLst>
-        </p:cTn>
-      </p:par>
-    </p:tnLst>
-    <p:bldLst>
-      <p:bldP spid="17" grpId="0"/>
-      <p:bldP spid="18" grpId="0"/>
-      <p:bldP spid="19" grpId="0"/>
-      <p:bldP spid="21" grpId="0"/>
-    </p:bldLst>
-  </p:timing>
-</p:sld>
-</file>
-
-<file path=ppt/slides/slide11.xml><?xml version="1.0" encoding="utf-8"?>
 <p:sld xmlns:a="http://schemas.openxmlformats.org/drawingml/2006/main" xmlns:r="http://schemas.openxmlformats.org/officeDocument/2006/relationships" xmlns:p="http://schemas.openxmlformats.org/presentationml/2006/main">
   <p:cSld>
     <p:spTree>
@@ -2668,7 +1854,7 @@
 </p:sld>
 </file>
 
-<file path=ppt/slides/slide12.xml><?xml version="1.0" encoding="utf-8"?>
+<file path=ppt/slides/slide11.xml><?xml version="1.0" encoding="utf-8"?>
 <p:sld xmlns:a="http://schemas.openxmlformats.org/drawingml/2006/main" xmlns:r="http://schemas.openxmlformats.org/officeDocument/2006/relationships" xmlns:p="http://schemas.openxmlformats.org/presentationml/2006/main">
   <p:cSld>
     <p:spTree>
@@ -3029,7 +2215,7 @@
 </p:sld>
 </file>
 
-<file path=ppt/slides/slide13.xml><?xml version="1.0" encoding="utf-8"?>
+<file path=ppt/slides/slide12.xml><?xml version="1.0" encoding="utf-8"?>
 <p:sld xmlns:a="http://schemas.openxmlformats.org/drawingml/2006/main" xmlns:r="http://schemas.openxmlformats.org/officeDocument/2006/relationships" xmlns:p="http://schemas.openxmlformats.org/presentationml/2006/main">
   <p:cSld>
     <p:spTree>
@@ -3196,141 +2382,6 @@
 </file>
 
 <file path=ppt/slides/slide2.xml><?xml version="1.0" encoding="utf-8"?>
-<p:sld xmlns:a="http://schemas.openxmlformats.org/drawingml/2006/main" xmlns:r="http://schemas.openxmlformats.org/officeDocument/2006/relationships" xmlns:p="http://schemas.openxmlformats.org/presentationml/2006/main">
-  <p:cSld>
-    <p:spTree>
-      <p:nvGrpSpPr>
-        <p:cNvPr id="1" name=""/>
-        <p:cNvGrpSpPr/>
-        <p:nvPr/>
-      </p:nvGrpSpPr>
-      <p:grpSpPr>
-        <a:xfrm>
-          <a:off x="0" y="0"/>
-          <a:ext cx="0" cy="0"/>
-          <a:chOff x="0" y="0"/>
-          <a:chExt cx="0" cy="0"/>
-        </a:xfrm>
-      </p:grpSpPr>
-      <p:sp>
-        <p:nvSpPr>
-          <p:cNvPr id="2" name="内容占位符 1">
-            <a:extLst>
-              <a:ext uri="{FF2B5EF4-FFF2-40B4-BE49-F238E27FC236}">
-                <a16:creationId xmlns:a16="http://schemas.microsoft.com/office/drawing/2014/main" id="{F708F177-1CE5-7E92-48B9-AC607F39747B}"/>
-              </a:ext>
-            </a:extLst>
-          </p:cNvPr>
-          <p:cNvSpPr>
-            <a:spLocks noGrp="1"/>
-          </p:cNvSpPr>
-          <p:nvPr>
-            <p:ph idx="1"/>
-          </p:nvPr>
-        </p:nvSpPr>
-        <p:spPr/>
-        <p:txBody>
-          <a:bodyPr/>
-          <a:lstStyle/>
-          <a:p>
-            <a:r>
-              <a:rPr lang="en-US" altLang="zh-CN" dirty="0"/>
-              <a:t>An example of </a:t>
-            </a:r>
-            <a:endParaRPr lang="zh-CN" altLang="en-US" dirty="0"/>
-          </a:p>
-        </p:txBody>
-      </p:sp>
-      <p:sp>
-        <p:nvSpPr>
-          <p:cNvPr id="3" name="标题 2">
-            <a:extLst>
-              <a:ext uri="{FF2B5EF4-FFF2-40B4-BE49-F238E27FC236}">
-                <a16:creationId xmlns:a16="http://schemas.microsoft.com/office/drawing/2014/main" id="{5D3A1214-8630-96BF-B036-35D4C3E3629E}"/>
-              </a:ext>
-            </a:extLst>
-          </p:cNvPr>
-          <p:cNvSpPr>
-            <a:spLocks noGrp="1"/>
-          </p:cNvSpPr>
-          <p:nvPr>
-            <p:ph type="title"/>
-          </p:nvPr>
-        </p:nvSpPr>
-        <p:spPr/>
-        <p:txBody>
-          <a:bodyPr/>
-          <a:lstStyle/>
-          <a:p>
-            <a:r>
-              <a:rPr lang="en-US" altLang="zh-CN" dirty="0"/>
-              <a:t>An intro to games</a:t>
-            </a:r>
-            <a:endParaRPr lang="zh-CN" altLang="en-US" dirty="0"/>
-          </a:p>
-        </p:txBody>
-      </p:sp>
-      <p:pic>
-        <p:nvPicPr>
-          <p:cNvPr id="1026" name="Picture 2" descr="星露谷物语 高清壁纸截图_星露谷物语 高清壁纸壁纸_星露谷物语 高清壁纸图片_3DM单机">
-            <a:extLst>
-              <a:ext uri="{FF2B5EF4-FFF2-40B4-BE49-F238E27FC236}">
-                <a16:creationId xmlns:a16="http://schemas.microsoft.com/office/drawing/2014/main" id="{71D1A77E-BC26-3C78-7C21-23A6D4F102FD}"/>
-              </a:ext>
-            </a:extLst>
-          </p:cNvPr>
-          <p:cNvPicPr>
-            <a:picLocks noChangeAspect="1" noChangeArrowheads="1"/>
-          </p:cNvPicPr>
-          <p:nvPr/>
-        </p:nvPicPr>
-        <p:blipFill>
-          <a:blip r:embed="rId2">
-            <a:extLst>
-              <a:ext uri="{28A0092B-C50C-407E-A947-70E740481C1C}">
-                <a14:useLocalDpi xmlns:a14="http://schemas.microsoft.com/office/drawing/2010/main" val="0"/>
-              </a:ext>
-            </a:extLst>
-          </a:blip>
-          <a:srcRect/>
-          <a:stretch>
-            <a:fillRect/>
-          </a:stretch>
-        </p:blipFill>
-        <p:spPr bwMode="auto">
-          <a:xfrm>
-            <a:off x="1919536" y="1988840"/>
-            <a:ext cx="8208912" cy="4617513"/>
-          </a:xfrm>
-          <a:prstGeom prst="rect">
-            <a:avLst/>
-          </a:prstGeom>
-          <a:noFill/>
-          <a:extLst>
-            <a:ext uri="{909E8E84-426E-40DD-AFC4-6F175D3DCCD1}">
-              <a14:hiddenFill xmlns:a14="http://schemas.microsoft.com/office/drawing/2010/main">
-                <a:solidFill>
-                  <a:srgbClr val="FFFFFF"/>
-                </a:solidFill>
-              </a14:hiddenFill>
-            </a:ext>
-          </a:extLst>
-        </p:spPr>
-      </p:pic>
-    </p:spTree>
-    <p:extLst>
-      <p:ext uri="{BB962C8B-B14F-4D97-AF65-F5344CB8AC3E}">
-        <p14:creationId xmlns:p14="http://schemas.microsoft.com/office/powerpoint/2010/main" val="4034147031"/>
-      </p:ext>
-    </p:extLst>
-  </p:cSld>
-  <p:clrMapOvr>
-    <a:masterClrMapping/>
-  </p:clrMapOvr>
-</p:sld>
-</file>
-
-<file path=ppt/slides/slide3.xml><?xml version="1.0" encoding="utf-8"?>
 <p:sld xmlns:a="http://schemas.openxmlformats.org/drawingml/2006/main" xmlns:r="http://schemas.openxmlformats.org/officeDocument/2006/relationships" xmlns:p="http://schemas.openxmlformats.org/presentationml/2006/main">
   <p:cSld>
     <p:spTree>
@@ -5831,7 +4882,7 @@
 </p:sld>
 </file>
 
-<file path=ppt/slides/slide4.xml><?xml version="1.0" encoding="utf-8"?>
+<file path=ppt/slides/slide3.xml><?xml version="1.0" encoding="utf-8"?>
 <p:sld xmlns:a="http://schemas.openxmlformats.org/drawingml/2006/main" xmlns:r="http://schemas.openxmlformats.org/officeDocument/2006/relationships" xmlns:p="http://schemas.openxmlformats.org/presentationml/2006/main">
   <p:cSld>
     <p:spTree>
@@ -6253,7 +5304,7 @@
 </p:sld>
 </file>
 
-<file path=ppt/slides/slide5.xml><?xml version="1.0" encoding="utf-8"?>
+<file path=ppt/slides/slide4.xml><?xml version="1.0" encoding="utf-8"?>
 <p:sld xmlns:a="http://schemas.openxmlformats.org/drawingml/2006/main" xmlns:r="http://schemas.openxmlformats.org/officeDocument/2006/relationships" xmlns:p="http://schemas.openxmlformats.org/presentationml/2006/main">
   <p:cSld>
     <p:spTree>
@@ -8808,7 +7859,7 @@
 </p:sld>
 </file>
 
-<file path=ppt/slides/slide6.xml><?xml version="1.0" encoding="utf-8"?>
+<file path=ppt/slides/slide5.xml><?xml version="1.0" encoding="utf-8"?>
 <p:sld xmlns:a="http://schemas.openxmlformats.org/drawingml/2006/main" xmlns:r="http://schemas.openxmlformats.org/officeDocument/2006/relationships" xmlns:p="http://schemas.openxmlformats.org/presentationml/2006/main">
   <p:cSld>
     <p:spTree>
@@ -10279,7 +9330,7 @@
 </p:sld>
 </file>
 
-<file path=ppt/slides/slide7.xml><?xml version="1.0" encoding="utf-8"?>
+<file path=ppt/slides/slide6.xml><?xml version="1.0" encoding="utf-8"?>
 <p:sld xmlns:a="http://schemas.openxmlformats.org/drawingml/2006/main" xmlns:r="http://schemas.openxmlformats.org/officeDocument/2006/relationships" xmlns:p="http://schemas.openxmlformats.org/presentationml/2006/main">
   <p:cSld>
     <p:spTree>
@@ -12285,7 +11336,7 @@
 </p:sld>
 </file>
 
-<file path=ppt/slides/slide8.xml><?xml version="1.0" encoding="utf-8"?>
+<file path=ppt/slides/slide7.xml><?xml version="1.0" encoding="utf-8"?>
 <p:sld xmlns:a="http://schemas.openxmlformats.org/drawingml/2006/main" xmlns:r="http://schemas.openxmlformats.org/officeDocument/2006/relationships" xmlns:p="http://schemas.openxmlformats.org/presentationml/2006/main">
   <p:cSld>
     <p:spTree>
@@ -15343,7 +14394,7 @@
 </p:sld>
 </file>
 
-<file path=ppt/slides/slide9.xml><?xml version="1.0" encoding="utf-8"?>
+<file path=ppt/slides/slide8.xml><?xml version="1.0" encoding="utf-8"?>
 <p:sld xmlns:a="http://schemas.openxmlformats.org/drawingml/2006/main" xmlns:r="http://schemas.openxmlformats.org/officeDocument/2006/relationships" xmlns:p="http://schemas.openxmlformats.org/presentationml/2006/main">
   <p:cSld>
     <p:spTree>
@@ -17858,6 +16909,819 @@
 </p:sld>
 </file>
 
+<file path=ppt/slides/slide9.xml><?xml version="1.0" encoding="utf-8"?>
+<p:sld xmlns:a="http://schemas.openxmlformats.org/drawingml/2006/main" xmlns:r="http://schemas.openxmlformats.org/officeDocument/2006/relationships" xmlns:p="http://schemas.openxmlformats.org/presentationml/2006/main">
+  <p:cSld>
+    <p:spTree>
+      <p:nvGrpSpPr>
+        <p:cNvPr id="1" name=""/>
+        <p:cNvGrpSpPr/>
+        <p:nvPr/>
+      </p:nvGrpSpPr>
+      <p:grpSpPr>
+        <a:xfrm>
+          <a:off x="0" y="0"/>
+          <a:ext cx="0" cy="0"/>
+          <a:chOff x="0" y="0"/>
+          <a:chExt cx="0" cy="0"/>
+        </a:xfrm>
+      </p:grpSpPr>
+      <p:sp>
+        <p:nvSpPr>
+          <p:cNvPr id="1048589" name="标题 4"/>
+          <p:cNvSpPr>
+            <a:spLocks noGrp="1"/>
+          </p:cNvSpPr>
+          <p:nvPr>
+            <p:ph type="title"/>
+          </p:nvPr>
+        </p:nvSpPr>
+        <p:spPr/>
+        <p:txBody>
+          <a:bodyPr>
+            <a:normAutofit/>
+          </a:bodyPr>
+          <a:lstStyle/>
+          <a:p>
+            <a:r>
+              <a:rPr lang="en-US" altLang="zh-CN" sz="4000" dirty="0"/>
+              <a:t>Sample Input / Output</a:t>
+            </a:r>
+            <a:endParaRPr lang="zh-CN" sz="4000" dirty="0"/>
+          </a:p>
+        </p:txBody>
+      </p:sp>
+      <p:pic>
+        <p:nvPicPr>
+          <p:cNvPr id="3" name="图片 2">
+            <a:extLst>
+              <a:ext uri="{FF2B5EF4-FFF2-40B4-BE49-F238E27FC236}">
+                <a16:creationId xmlns:a16="http://schemas.microsoft.com/office/drawing/2014/main" id="{F0DA8A89-735F-33BC-793C-A0B2730D9C0F}"/>
+              </a:ext>
+            </a:extLst>
+          </p:cNvPr>
+          <p:cNvPicPr>
+            <a:picLocks noChangeAspect="1"/>
+          </p:cNvPicPr>
+          <p:nvPr/>
+        </p:nvPicPr>
+        <p:blipFill>
+          <a:blip r:embed="rId2"/>
+          <a:stretch>
+            <a:fillRect/>
+          </a:stretch>
+        </p:blipFill>
+        <p:spPr>
+          <a:xfrm>
+            <a:off x="479376" y="1332218"/>
+            <a:ext cx="3526630" cy="2448272"/>
+          </a:xfrm>
+          <a:prstGeom prst="rect">
+            <a:avLst/>
+          </a:prstGeom>
+        </p:spPr>
+      </p:pic>
+      <p:pic>
+        <p:nvPicPr>
+          <p:cNvPr id="7" name="图片 6">
+            <a:extLst>
+              <a:ext uri="{FF2B5EF4-FFF2-40B4-BE49-F238E27FC236}">
+                <a16:creationId xmlns:a16="http://schemas.microsoft.com/office/drawing/2014/main" id="{2E5E1A90-C41C-1431-EBED-2BC465250CD3}"/>
+              </a:ext>
+            </a:extLst>
+          </p:cNvPr>
+          <p:cNvPicPr>
+            <a:picLocks noChangeAspect="1"/>
+          </p:cNvPicPr>
+          <p:nvPr/>
+        </p:nvPicPr>
+        <p:blipFill>
+          <a:blip r:embed="rId3"/>
+          <a:stretch>
+            <a:fillRect/>
+          </a:stretch>
+        </p:blipFill>
+        <p:spPr>
+          <a:xfrm>
+            <a:off x="5999526" y="1332218"/>
+            <a:ext cx="3558582" cy="2448272"/>
+          </a:xfrm>
+          <a:prstGeom prst="rect">
+            <a:avLst/>
+          </a:prstGeom>
+        </p:spPr>
+      </p:pic>
+      <p:pic>
+        <p:nvPicPr>
+          <p:cNvPr id="12" name="图片 11">
+            <a:extLst>
+              <a:ext uri="{FF2B5EF4-FFF2-40B4-BE49-F238E27FC236}">
+                <a16:creationId xmlns:a16="http://schemas.microsoft.com/office/drawing/2014/main" id="{748AB263-5386-B9E8-9845-F91DC9D2FA5B}"/>
+              </a:ext>
+            </a:extLst>
+          </p:cNvPr>
+          <p:cNvPicPr>
+            <a:picLocks noChangeAspect="1"/>
+          </p:cNvPicPr>
+          <p:nvPr/>
+        </p:nvPicPr>
+        <p:blipFill rotWithShape="1">
+          <a:blip r:embed="rId4"/>
+          <a:srcRect b="669"/>
+          <a:stretch/>
+        </p:blipFill>
+        <p:spPr>
+          <a:xfrm>
+            <a:off x="503495" y="4054062"/>
+            <a:ext cx="3526630" cy="2399274"/>
+          </a:xfrm>
+          <a:prstGeom prst="rect">
+            <a:avLst/>
+          </a:prstGeom>
+        </p:spPr>
+      </p:pic>
+      <p:pic>
+        <p:nvPicPr>
+          <p:cNvPr id="15" name="图片 14">
+            <a:extLst>
+              <a:ext uri="{FF2B5EF4-FFF2-40B4-BE49-F238E27FC236}">
+                <a16:creationId xmlns:a16="http://schemas.microsoft.com/office/drawing/2014/main" id="{51B99DEB-2D80-85E0-7BA5-8D5033DC10AA}"/>
+              </a:ext>
+            </a:extLst>
+          </p:cNvPr>
+          <p:cNvPicPr>
+            <a:picLocks noChangeAspect="1"/>
+          </p:cNvPicPr>
+          <p:nvPr/>
+        </p:nvPicPr>
+        <p:blipFill rotWithShape="1">
+          <a:blip r:embed="rId5"/>
+          <a:srcRect b="527"/>
+          <a:stretch/>
+        </p:blipFill>
+        <p:spPr>
+          <a:xfrm>
+            <a:off x="6299465" y="4010232"/>
+            <a:ext cx="3043171" cy="2486934"/>
+          </a:xfrm>
+          <a:prstGeom prst="rect">
+            <a:avLst/>
+          </a:prstGeom>
+        </p:spPr>
+      </p:pic>
+      <p:sp>
+        <p:nvSpPr>
+          <p:cNvPr id="17" name="文本框 16">
+            <a:extLst>
+              <a:ext uri="{FF2B5EF4-FFF2-40B4-BE49-F238E27FC236}">
+                <a16:creationId xmlns:a16="http://schemas.microsoft.com/office/drawing/2014/main" id="{7ADFFD97-1D7B-A28F-4308-10077F6FD85A}"/>
+              </a:ext>
+            </a:extLst>
+          </p:cNvPr>
+          <p:cNvSpPr txBox="1"/>
+          <p:nvPr/>
+        </p:nvSpPr>
+        <p:spPr>
+          <a:xfrm>
+            <a:off x="4030125" y="2132195"/>
+            <a:ext cx="1944216" cy="584775"/>
+          </a:xfrm>
+          <a:prstGeom prst="rect">
+            <a:avLst/>
+          </a:prstGeom>
+          <a:noFill/>
+        </p:spPr>
+        <p:txBody>
+          <a:bodyPr wrap="square" rtlCol="0">
+            <a:spAutoFit/>
+          </a:bodyPr>
+          <a:lstStyle/>
+          <a:p>
+            <a:r>
+              <a:rPr lang="zh-CN" altLang="en-US" sz="1600" dirty="0"/>
+              <a:t>① </a:t>
+            </a:r>
+            <a:r>
+              <a:rPr lang="en-US" altLang="zh-CN" sz="1600" dirty="0"/>
+              <a:t>Initialized board</a:t>
+            </a:r>
+          </a:p>
+          <a:p>
+            <a:r>
+              <a:rPr lang="en-US" altLang="zh-CN" sz="1600" dirty="0"/>
+              <a:t>     Player 1 picks (1,1)</a:t>
+            </a:r>
+          </a:p>
+        </p:txBody>
+      </p:sp>
+      <p:sp>
+        <p:nvSpPr>
+          <p:cNvPr id="18" name="文本框 17">
+            <a:extLst>
+              <a:ext uri="{FF2B5EF4-FFF2-40B4-BE49-F238E27FC236}">
+                <a16:creationId xmlns:a16="http://schemas.microsoft.com/office/drawing/2014/main" id="{AB906864-695E-8EB4-BD97-622807CF6924}"/>
+              </a:ext>
+            </a:extLst>
+          </p:cNvPr>
+          <p:cNvSpPr txBox="1"/>
+          <p:nvPr/>
+        </p:nvSpPr>
+        <p:spPr>
+          <a:xfrm>
+            <a:off x="9743942" y="2132195"/>
+            <a:ext cx="2184706" cy="584775"/>
+          </a:xfrm>
+          <a:prstGeom prst="rect">
+            <a:avLst/>
+          </a:prstGeom>
+          <a:noFill/>
+        </p:spPr>
+        <p:txBody>
+          <a:bodyPr wrap="square" rtlCol="0">
+            <a:spAutoFit/>
+          </a:bodyPr>
+          <a:lstStyle/>
+          <a:p>
+            <a:r>
+              <a:rPr lang="zh-CN" altLang="en-US" sz="1600" dirty="0"/>
+              <a:t>② </a:t>
+            </a:r>
+            <a:r>
+              <a:rPr lang="en-US" altLang="zh-CN" sz="1600" dirty="0"/>
+              <a:t>(1,1) shown with “X”</a:t>
+            </a:r>
+          </a:p>
+          <a:p>
+            <a:r>
+              <a:rPr lang="en-US" altLang="zh-CN" sz="1600" dirty="0"/>
+              <a:t>     Player 2 picks (1,2)</a:t>
+            </a:r>
+          </a:p>
+        </p:txBody>
+      </p:sp>
+      <p:sp>
+        <p:nvSpPr>
+          <p:cNvPr id="19" name="文本框 18">
+            <a:extLst>
+              <a:ext uri="{FF2B5EF4-FFF2-40B4-BE49-F238E27FC236}">
+                <a16:creationId xmlns:a16="http://schemas.microsoft.com/office/drawing/2014/main" id="{096283CD-9E7F-E506-6FD1-AE523DD84E76}"/>
+              </a:ext>
+            </a:extLst>
+          </p:cNvPr>
+          <p:cNvSpPr txBox="1"/>
+          <p:nvPr/>
+        </p:nvSpPr>
+        <p:spPr>
+          <a:xfrm>
+            <a:off x="4079776" y="4293096"/>
+            <a:ext cx="2184706" cy="584775"/>
+          </a:xfrm>
+          <a:prstGeom prst="rect">
+            <a:avLst/>
+          </a:prstGeom>
+          <a:noFill/>
+        </p:spPr>
+        <p:txBody>
+          <a:bodyPr wrap="square" rtlCol="0">
+            <a:spAutoFit/>
+          </a:bodyPr>
+          <a:lstStyle/>
+          <a:p>
+            <a:r>
+              <a:rPr lang="zh-CN" altLang="en-US" sz="1600" dirty="0"/>
+              <a:t>③ </a:t>
+            </a:r>
+            <a:r>
+              <a:rPr lang="en-US" altLang="zh-CN" sz="1600" dirty="0"/>
+              <a:t>(1,2) shown with “O”</a:t>
+            </a:r>
+          </a:p>
+          <a:p>
+            <a:r>
+              <a:rPr lang="en-US" altLang="zh-CN" sz="1600" dirty="0"/>
+              <a:t>     Player 2 picks (1,1)</a:t>
+            </a:r>
+          </a:p>
+        </p:txBody>
+      </p:sp>
+      <p:sp>
+        <p:nvSpPr>
+          <p:cNvPr id="21" name="文本框 20">
+            <a:extLst>
+              <a:ext uri="{FF2B5EF4-FFF2-40B4-BE49-F238E27FC236}">
+                <a16:creationId xmlns:a16="http://schemas.microsoft.com/office/drawing/2014/main" id="{F7D7F0D5-F9DD-B515-ED0B-C65298166B2E}"/>
+              </a:ext>
+            </a:extLst>
+          </p:cNvPr>
+          <p:cNvSpPr txBox="1"/>
+          <p:nvPr/>
+        </p:nvSpPr>
+        <p:spPr>
+          <a:xfrm>
+            <a:off x="9696400" y="4293675"/>
+            <a:ext cx="2184706" cy="584775"/>
+          </a:xfrm>
+          <a:prstGeom prst="rect">
+            <a:avLst/>
+          </a:prstGeom>
+          <a:noFill/>
+        </p:spPr>
+        <p:txBody>
+          <a:bodyPr wrap="square" rtlCol="0">
+            <a:spAutoFit/>
+          </a:bodyPr>
+          <a:lstStyle/>
+          <a:p>
+            <a:r>
+              <a:rPr lang="zh-CN" altLang="en-US" sz="1600" dirty="0"/>
+              <a:t>④ </a:t>
+            </a:r>
+            <a:r>
+              <a:rPr lang="en-US" altLang="zh-CN" sz="1600" dirty="0"/>
+              <a:t>Invalid hint provided</a:t>
+            </a:r>
+          </a:p>
+          <a:p>
+            <a:r>
+              <a:rPr lang="en-US" altLang="zh-CN" sz="1600" dirty="0"/>
+              <a:t>     Player 1 picks again</a:t>
+            </a:r>
+          </a:p>
+        </p:txBody>
+      </p:sp>
+    </p:spTree>
+    <p:extLst>
+      <p:ext uri="{BB962C8B-B14F-4D97-AF65-F5344CB8AC3E}">
+        <p14:creationId xmlns:p14="http://schemas.microsoft.com/office/powerpoint/2010/main" val="2605814159"/>
+      </p:ext>
+    </p:extLst>
+  </p:cSld>
+  <p:clrMapOvr>
+    <a:masterClrMapping/>
+  </p:clrMapOvr>
+  <p:timing>
+    <p:tnLst>
+      <p:par>
+        <p:cTn id="1" dur="indefinite" restart="never" nodeType="tmRoot">
+          <p:childTnLst>
+            <p:seq concurrent="1" nextAc="seek">
+              <p:cTn id="2" dur="indefinite" nodeType="mainSeq">
+                <p:childTnLst>
+                  <p:par>
+                    <p:cTn id="3" fill="hold">
+                      <p:stCondLst>
+                        <p:cond delay="indefinite"/>
+                      </p:stCondLst>
+                      <p:childTnLst>
+                        <p:par>
+                          <p:cTn id="4" fill="hold">
+                            <p:stCondLst>
+                              <p:cond delay="0"/>
+                            </p:stCondLst>
+                            <p:childTnLst>
+                              <p:par>
+                                <p:cTn id="5" presetID="10" presetClass="entr" presetSubtype="0" fill="hold" nodeType="clickEffect">
+                                  <p:stCondLst>
+                                    <p:cond delay="0"/>
+                                  </p:stCondLst>
+                                  <p:childTnLst>
+                                    <p:set>
+                                      <p:cBhvr>
+                                        <p:cTn id="6" dur="1" fill="hold">
+                                          <p:stCondLst>
+                                            <p:cond delay="0"/>
+                                          </p:stCondLst>
+                                        </p:cTn>
+                                        <p:tgtEl>
+                                          <p:spTgt spid="3"/>
+                                        </p:tgtEl>
+                                        <p:attrNameLst>
+                                          <p:attrName>style.visibility</p:attrName>
+                                        </p:attrNameLst>
+                                      </p:cBhvr>
+                                      <p:to>
+                                        <p:strVal val="visible"/>
+                                      </p:to>
+                                    </p:set>
+                                    <p:animEffect transition="in" filter="fade">
+                                      <p:cBhvr>
+                                        <p:cTn id="7" dur="500"/>
+                                        <p:tgtEl>
+                                          <p:spTgt spid="3"/>
+                                        </p:tgtEl>
+                                      </p:cBhvr>
+                                    </p:animEffect>
+                                  </p:childTnLst>
+                                </p:cTn>
+                              </p:par>
+                            </p:childTnLst>
+                          </p:cTn>
+                        </p:par>
+                      </p:childTnLst>
+                    </p:cTn>
+                  </p:par>
+                  <p:par>
+                    <p:cTn id="8" fill="hold">
+                      <p:stCondLst>
+                        <p:cond delay="indefinite"/>
+                      </p:stCondLst>
+                      <p:childTnLst>
+                        <p:par>
+                          <p:cTn id="9" fill="hold">
+                            <p:stCondLst>
+                              <p:cond delay="0"/>
+                            </p:stCondLst>
+                            <p:childTnLst>
+                              <p:par>
+                                <p:cTn id="10" presetID="10" presetClass="entr" presetSubtype="0" fill="hold" grpId="0" nodeType="clickEffect">
+                                  <p:stCondLst>
+                                    <p:cond delay="0"/>
+                                  </p:stCondLst>
+                                  <p:childTnLst>
+                                    <p:set>
+                                      <p:cBhvr>
+                                        <p:cTn id="11" dur="1" fill="hold">
+                                          <p:stCondLst>
+                                            <p:cond delay="0"/>
+                                          </p:stCondLst>
+                                        </p:cTn>
+                                        <p:tgtEl>
+                                          <p:spTgt spid="17"/>
+                                        </p:tgtEl>
+                                        <p:attrNameLst>
+                                          <p:attrName>style.visibility</p:attrName>
+                                        </p:attrNameLst>
+                                      </p:cBhvr>
+                                      <p:to>
+                                        <p:strVal val="visible"/>
+                                      </p:to>
+                                    </p:set>
+                                    <p:animEffect transition="in" filter="fade">
+                                      <p:cBhvr>
+                                        <p:cTn id="12" dur="500"/>
+                                        <p:tgtEl>
+                                          <p:spTgt spid="17"/>
+                                        </p:tgtEl>
+                                      </p:cBhvr>
+                                    </p:animEffect>
+                                  </p:childTnLst>
+                                </p:cTn>
+                              </p:par>
+                            </p:childTnLst>
+                          </p:cTn>
+                        </p:par>
+                      </p:childTnLst>
+                    </p:cTn>
+                  </p:par>
+                  <p:par>
+                    <p:cTn id="13" fill="hold">
+                      <p:stCondLst>
+                        <p:cond delay="indefinite"/>
+                      </p:stCondLst>
+                      <p:childTnLst>
+                        <p:par>
+                          <p:cTn id="14" fill="hold">
+                            <p:stCondLst>
+                              <p:cond delay="0"/>
+                            </p:stCondLst>
+                            <p:childTnLst>
+                              <p:par>
+                                <p:cTn id="15" presetID="10" presetClass="entr" presetSubtype="0" fill="hold" nodeType="clickEffect">
+                                  <p:stCondLst>
+                                    <p:cond delay="0"/>
+                                  </p:stCondLst>
+                                  <p:childTnLst>
+                                    <p:set>
+                                      <p:cBhvr>
+                                        <p:cTn id="16" dur="1" fill="hold">
+                                          <p:stCondLst>
+                                            <p:cond delay="0"/>
+                                          </p:stCondLst>
+                                        </p:cTn>
+                                        <p:tgtEl>
+                                          <p:spTgt spid="7"/>
+                                        </p:tgtEl>
+                                        <p:attrNameLst>
+                                          <p:attrName>style.visibility</p:attrName>
+                                        </p:attrNameLst>
+                                      </p:cBhvr>
+                                      <p:to>
+                                        <p:strVal val="visible"/>
+                                      </p:to>
+                                    </p:set>
+                                    <p:animEffect transition="in" filter="fade">
+                                      <p:cBhvr>
+                                        <p:cTn id="17" dur="500"/>
+                                        <p:tgtEl>
+                                          <p:spTgt spid="7"/>
+                                        </p:tgtEl>
+                                      </p:cBhvr>
+                                    </p:animEffect>
+                                  </p:childTnLst>
+                                </p:cTn>
+                              </p:par>
+                            </p:childTnLst>
+                          </p:cTn>
+                        </p:par>
+                      </p:childTnLst>
+                    </p:cTn>
+                  </p:par>
+                  <p:par>
+                    <p:cTn id="18" fill="hold">
+                      <p:stCondLst>
+                        <p:cond delay="indefinite"/>
+                      </p:stCondLst>
+                      <p:childTnLst>
+                        <p:par>
+                          <p:cTn id="19" fill="hold">
+                            <p:stCondLst>
+                              <p:cond delay="0"/>
+                            </p:stCondLst>
+                            <p:childTnLst>
+                              <p:par>
+                                <p:cTn id="20" presetID="10" presetClass="entr" presetSubtype="0" fill="hold" grpId="0" nodeType="clickEffect">
+                                  <p:stCondLst>
+                                    <p:cond delay="0"/>
+                                  </p:stCondLst>
+                                  <p:childTnLst>
+                                    <p:set>
+                                      <p:cBhvr>
+                                        <p:cTn id="21" dur="1" fill="hold">
+                                          <p:stCondLst>
+                                            <p:cond delay="0"/>
+                                          </p:stCondLst>
+                                        </p:cTn>
+                                        <p:tgtEl>
+                                          <p:spTgt spid="18"/>
+                                        </p:tgtEl>
+                                        <p:attrNameLst>
+                                          <p:attrName>style.visibility</p:attrName>
+                                        </p:attrNameLst>
+                                      </p:cBhvr>
+                                      <p:to>
+                                        <p:strVal val="visible"/>
+                                      </p:to>
+                                    </p:set>
+                                    <p:animEffect transition="in" filter="fade">
+                                      <p:cBhvr>
+                                        <p:cTn id="22" dur="500"/>
+                                        <p:tgtEl>
+                                          <p:spTgt spid="18"/>
+                                        </p:tgtEl>
+                                      </p:cBhvr>
+                                    </p:animEffect>
+                                  </p:childTnLst>
+                                </p:cTn>
+                              </p:par>
+                            </p:childTnLst>
+                          </p:cTn>
+                        </p:par>
+                      </p:childTnLst>
+                    </p:cTn>
+                  </p:par>
+                  <p:par>
+                    <p:cTn id="23" fill="hold">
+                      <p:stCondLst>
+                        <p:cond delay="indefinite"/>
+                      </p:stCondLst>
+                      <p:childTnLst>
+                        <p:par>
+                          <p:cTn id="24" fill="hold">
+                            <p:stCondLst>
+                              <p:cond delay="0"/>
+                            </p:stCondLst>
+                            <p:childTnLst>
+                              <p:par>
+                                <p:cTn id="25" presetID="10" presetClass="entr" presetSubtype="0" fill="hold" nodeType="clickEffect">
+                                  <p:stCondLst>
+                                    <p:cond delay="0"/>
+                                  </p:stCondLst>
+                                  <p:childTnLst>
+                                    <p:set>
+                                      <p:cBhvr>
+                                        <p:cTn id="26" dur="1" fill="hold">
+                                          <p:stCondLst>
+                                            <p:cond delay="0"/>
+                                          </p:stCondLst>
+                                        </p:cTn>
+                                        <p:tgtEl>
+                                          <p:spTgt spid="12"/>
+                                        </p:tgtEl>
+                                        <p:attrNameLst>
+                                          <p:attrName>style.visibility</p:attrName>
+                                        </p:attrNameLst>
+                                      </p:cBhvr>
+                                      <p:to>
+                                        <p:strVal val="visible"/>
+                                      </p:to>
+                                    </p:set>
+                                    <p:animEffect transition="in" filter="fade">
+                                      <p:cBhvr>
+                                        <p:cTn id="27" dur="500"/>
+                                        <p:tgtEl>
+                                          <p:spTgt spid="12"/>
+                                        </p:tgtEl>
+                                      </p:cBhvr>
+                                    </p:animEffect>
+                                  </p:childTnLst>
+                                </p:cTn>
+                              </p:par>
+                            </p:childTnLst>
+                          </p:cTn>
+                        </p:par>
+                      </p:childTnLst>
+                    </p:cTn>
+                  </p:par>
+                  <p:par>
+                    <p:cTn id="28" fill="hold">
+                      <p:stCondLst>
+                        <p:cond delay="indefinite"/>
+                      </p:stCondLst>
+                      <p:childTnLst>
+                        <p:par>
+                          <p:cTn id="29" fill="hold">
+                            <p:stCondLst>
+                              <p:cond delay="0"/>
+                            </p:stCondLst>
+                            <p:childTnLst>
+                              <p:par>
+                                <p:cTn id="30" presetID="10" presetClass="entr" presetSubtype="0" fill="hold" grpId="0" nodeType="clickEffect">
+                                  <p:stCondLst>
+                                    <p:cond delay="0"/>
+                                  </p:stCondLst>
+                                  <p:childTnLst>
+                                    <p:set>
+                                      <p:cBhvr>
+                                        <p:cTn id="31" dur="1" fill="hold">
+                                          <p:stCondLst>
+                                            <p:cond delay="0"/>
+                                          </p:stCondLst>
+                                        </p:cTn>
+                                        <p:tgtEl>
+                                          <p:spTgt spid="19"/>
+                                        </p:tgtEl>
+                                        <p:attrNameLst>
+                                          <p:attrName>style.visibility</p:attrName>
+                                        </p:attrNameLst>
+                                      </p:cBhvr>
+                                      <p:to>
+                                        <p:strVal val="visible"/>
+                                      </p:to>
+                                    </p:set>
+                                    <p:animEffect transition="in" filter="fade">
+                                      <p:cBhvr>
+                                        <p:cTn id="32" dur="500"/>
+                                        <p:tgtEl>
+                                          <p:spTgt spid="19"/>
+                                        </p:tgtEl>
+                                      </p:cBhvr>
+                                    </p:animEffect>
+                                  </p:childTnLst>
+                                </p:cTn>
+                              </p:par>
+                            </p:childTnLst>
+                          </p:cTn>
+                        </p:par>
+                      </p:childTnLst>
+                    </p:cTn>
+                  </p:par>
+                  <p:par>
+                    <p:cTn id="33" fill="hold">
+                      <p:stCondLst>
+                        <p:cond delay="indefinite"/>
+                      </p:stCondLst>
+                      <p:childTnLst>
+                        <p:par>
+                          <p:cTn id="34" fill="hold">
+                            <p:stCondLst>
+                              <p:cond delay="0"/>
+                            </p:stCondLst>
+                            <p:childTnLst>
+                              <p:par>
+                                <p:cTn id="35" presetID="10" presetClass="entr" presetSubtype="0" fill="hold" nodeType="clickEffect">
+                                  <p:stCondLst>
+                                    <p:cond delay="0"/>
+                                  </p:stCondLst>
+                                  <p:childTnLst>
+                                    <p:set>
+                                      <p:cBhvr>
+                                        <p:cTn id="36" dur="1" fill="hold">
+                                          <p:stCondLst>
+                                            <p:cond delay="0"/>
+                                          </p:stCondLst>
+                                        </p:cTn>
+                                        <p:tgtEl>
+                                          <p:spTgt spid="15"/>
+                                        </p:tgtEl>
+                                        <p:attrNameLst>
+                                          <p:attrName>style.visibility</p:attrName>
+                                        </p:attrNameLst>
+                                      </p:cBhvr>
+                                      <p:to>
+                                        <p:strVal val="visible"/>
+                                      </p:to>
+                                    </p:set>
+                                    <p:animEffect transition="in" filter="fade">
+                                      <p:cBhvr>
+                                        <p:cTn id="37" dur="500"/>
+                                        <p:tgtEl>
+                                          <p:spTgt spid="15"/>
+                                        </p:tgtEl>
+                                      </p:cBhvr>
+                                    </p:animEffect>
+                                  </p:childTnLst>
+                                </p:cTn>
+                              </p:par>
+                            </p:childTnLst>
+                          </p:cTn>
+                        </p:par>
+                      </p:childTnLst>
+                    </p:cTn>
+                  </p:par>
+                  <p:par>
+                    <p:cTn id="38" fill="hold">
+                      <p:stCondLst>
+                        <p:cond delay="indefinite"/>
+                      </p:stCondLst>
+                      <p:childTnLst>
+                        <p:par>
+                          <p:cTn id="39" fill="hold">
+                            <p:stCondLst>
+                              <p:cond delay="0"/>
+                            </p:stCondLst>
+                            <p:childTnLst>
+                              <p:par>
+                                <p:cTn id="40" presetID="10" presetClass="entr" presetSubtype="0" fill="hold" grpId="0" nodeType="clickEffect">
+                                  <p:stCondLst>
+                                    <p:cond delay="0"/>
+                                  </p:stCondLst>
+                                  <p:childTnLst>
+                                    <p:set>
+                                      <p:cBhvr>
+                                        <p:cTn id="41" dur="1" fill="hold">
+                                          <p:stCondLst>
+                                            <p:cond delay="0"/>
+                                          </p:stCondLst>
+                                        </p:cTn>
+                                        <p:tgtEl>
+                                          <p:spTgt spid="21"/>
+                                        </p:tgtEl>
+                                        <p:attrNameLst>
+                                          <p:attrName>style.visibility</p:attrName>
+                                        </p:attrNameLst>
+                                      </p:cBhvr>
+                                      <p:to>
+                                        <p:strVal val="visible"/>
+                                      </p:to>
+                                    </p:set>
+                                    <p:animEffect transition="in" filter="fade">
+                                      <p:cBhvr>
+                                        <p:cTn id="42" dur="500"/>
+                                        <p:tgtEl>
+                                          <p:spTgt spid="21"/>
+                                        </p:tgtEl>
+                                      </p:cBhvr>
+                                    </p:animEffect>
+                                  </p:childTnLst>
+                                </p:cTn>
+                              </p:par>
+                            </p:childTnLst>
+                          </p:cTn>
+                        </p:par>
+                      </p:childTnLst>
+                    </p:cTn>
+                  </p:par>
+                </p:childTnLst>
+              </p:cTn>
+              <p:prevCondLst>
+                <p:cond evt="onPrev" delay="0">
+                  <p:tgtEl>
+                    <p:sldTgt/>
+                  </p:tgtEl>
+                </p:cond>
+              </p:prevCondLst>
+              <p:nextCondLst>
+                <p:cond evt="onNext" delay="0">
+                  <p:tgtEl>
+                    <p:sldTgt/>
+                  </p:tgtEl>
+                </p:cond>
+              </p:nextCondLst>
+            </p:seq>
+          </p:childTnLst>
+        </p:cTn>
+      </p:par>
+    </p:tnLst>
+    <p:bldLst>
+      <p:bldP spid="17" grpId="0"/>
+      <p:bldP spid="18" grpId="0"/>
+      <p:bldP spid="19" grpId="0"/>
+      <p:bldP spid="21" grpId="0"/>
+    </p:bldLst>
+  </p:timing>
+</p:sld>
+</file>
+
 <file path=ppt/tags/tag1.xml><?xml version="1.0" encoding="utf-8"?>
 <p:tagLst xmlns:a="http://schemas.openxmlformats.org/drawingml/2006/main" xmlns:r="http://schemas.openxmlformats.org/officeDocument/2006/relationships" xmlns:p="http://schemas.openxmlformats.org/presentationml/2006/main">
   <p:tag name="KSO_WPP_MARK_KEY" val="1fe9a046-a2a9-43bc-a645-b850c7246860"/>
